--- a/fwdproject/Final_ppt_batch13_finalppt.pptx
+++ b/fwdproject/Final_ppt_batch13_finalppt.pptx
@@ -5063,28 +5063,27 @@
       </p:sp>
       <p:pic>
         <p:nvPicPr>
-          <p:cNvPr id="5" name="Picture 4"/>
+          <p:cNvPr id="6" name="Picture 5">
+            <a:extLst>
+              <a:ext uri="{FF2B5EF4-FFF2-40B4-BE49-F238E27FC236}">
+                <a16:creationId xmlns:a16="http://schemas.microsoft.com/office/drawing/2014/main" id="{919F2565-E0F7-46FC-2560-F04916B177AD}"/>
+              </a:ext>
+            </a:extLst>
+          </p:cNvPr>
           <p:cNvPicPr>
             <a:picLocks noChangeAspect="1"/>
           </p:cNvPicPr>
           <p:nvPr/>
         </p:nvPicPr>
         <p:blipFill>
-          <a:blip r:embed="rId2">
-            <a:extLst>
-              <a:ext uri="{28A0092B-C50C-407E-A947-70E740481C1C}">
-                <a14:useLocalDpi xmlns:a14="http://schemas.microsoft.com/office/drawing/2010/main" val="0"/>
-              </a:ext>
-            </a:extLst>
-          </a:blip>
-          <a:stretch>
-            <a:fillRect/>
-          </a:stretch>
+          <a:blip r:embed="rId2"/>
+          <a:srcRect t="4967" b="6275"/>
+          <a:stretch/>
         </p:blipFill>
         <p:spPr>
           <a:xfrm>
-            <a:off x="378822" y="1128463"/>
-            <a:ext cx="11338561" cy="5473923"/>
+            <a:off x="0" y="770963"/>
+            <a:ext cx="12192000" cy="6087036"/>
           </a:xfrm>
           <a:prstGeom prst="rect">
             <a:avLst/>
